--- a/Course/template.pptx
+++ b/Course/template.pptx
@@ -2653,15 +2653,15 @@
         </p:nvSpPr>
         <p:spPr>
           <a:xfrm>
-            <a:off x="457201" y="204787"/>
-            <a:ext cx="3008313" cy="871538"/>
+            <a:off x="457200" y="205740"/>
+            <a:ext cx="8229600" cy="874395"/>
           </a:xfrm>
         </p:spPr>
         <p:txBody>
           <a:bodyPr anchor="b"/>
           <a:lstStyle>
             <a:lvl1pPr algn="l">
-              <a:defRPr sz="1500" b="1"/>
+              <a:defRPr b="1"/>
             </a:lvl1pPr>
           </a:lstStyle>
           <a:p>
@@ -2692,31 +2692,31 @@
           <a:bodyPr/>
           <a:lstStyle>
             <a:lvl1pPr>
-              <a:defRPr sz="2400"/>
+              <a:defRPr/>
             </a:lvl1pPr>
             <a:lvl2pPr>
-              <a:defRPr sz="2100"/>
+              <a:defRPr/>
             </a:lvl2pPr>
             <a:lvl3pPr>
-              <a:defRPr sz="1800"/>
+              <a:defRPr/>
             </a:lvl3pPr>
             <a:lvl4pPr>
-              <a:defRPr sz="1500"/>
+              <a:defRPr/>
             </a:lvl4pPr>
             <a:lvl5pPr>
-              <a:defRPr sz="1500"/>
+              <a:defRPr/>
             </a:lvl5pPr>
             <a:lvl6pPr>
-              <a:defRPr sz="1500"/>
+              <a:defRPr/>
             </a:lvl6pPr>
             <a:lvl7pPr>
-              <a:defRPr sz="1500"/>
+              <a:defRPr/>
             </a:lvl7pPr>
             <a:lvl8pPr>
-              <a:defRPr sz="1500"/>
+              <a:defRPr/>
             </a:lvl8pPr>
             <a:lvl9pPr>
-              <a:defRPr sz="1500"/>
+              <a:defRPr/>
             </a:lvl9pPr>
           </a:lstStyle>
           <a:p>
@@ -2768,8 +2768,8 @@
         </p:nvSpPr>
         <p:spPr>
           <a:xfrm>
-            <a:off x="457201" y="1076326"/>
-            <a:ext cx="3008313" cy="3518297"/>
+            <a:off x="457200" y="1234440"/>
+            <a:ext cx="8229600" cy="822960"/>
           </a:xfrm>
         </p:spPr>
         <p:txBody>
@@ -2777,39 +2777,39 @@
           <a:lstStyle>
             <a:lvl1pPr marL="0" indent="0">
               <a:buNone/>
-              <a:defRPr sz="1050"/>
+              <a:defRPr/>
             </a:lvl1pPr>
             <a:lvl2pPr marL="342900" indent="0">
               <a:buNone/>
-              <a:defRPr sz="900"/>
+              <a:defRPr/>
             </a:lvl2pPr>
             <a:lvl3pPr marL="685800" indent="0">
               <a:buNone/>
-              <a:defRPr sz="750"/>
+              <a:defRPr/>
             </a:lvl3pPr>
             <a:lvl4pPr marL="1028700" indent="0">
               <a:buNone/>
-              <a:defRPr sz="675"/>
+              <a:defRPr/>
             </a:lvl4pPr>
             <a:lvl5pPr marL="1371600" indent="0">
               <a:buNone/>
-              <a:defRPr sz="675"/>
+              <a:defRPr/>
             </a:lvl5pPr>
             <a:lvl6pPr marL="1714500" indent="0">
               <a:buNone/>
-              <a:defRPr sz="675"/>
+              <a:defRPr/>
             </a:lvl6pPr>
             <a:lvl7pPr marL="2057400" indent="0">
               <a:buNone/>
-              <a:defRPr sz="675"/>
+              <a:defRPr/>
             </a:lvl7pPr>
             <a:lvl8pPr marL="2400300" indent="0">
               <a:buNone/>
-              <a:defRPr sz="675"/>
+              <a:defRPr/>
             </a:lvl8pPr>
             <a:lvl9pPr marL="2743200" indent="0">
               <a:buNone/>
-              <a:defRPr sz="675"/>
+              <a:defRPr/>
             </a:lvl9pPr>
           </a:lstStyle>
           <a:p>
@@ -2928,15 +2928,15 @@
         </p:nvSpPr>
         <p:spPr>
           <a:xfrm>
-            <a:off x="1792288" y="3600450"/>
-            <a:ext cx="5486400" cy="425054"/>
+            <a:off x="457200" y="205740"/>
+            <a:ext cx="8229600" cy="874395"/>
           </a:xfrm>
         </p:spPr>
         <p:txBody>
           <a:bodyPr anchor="b"/>
           <a:lstStyle>
             <a:lvl1pPr algn="l">
-              <a:defRPr sz="1500" b="1"/>
+              <a:defRPr b="1"/>
             </a:lvl1pPr>
           </a:lstStyle>
           <a:p>
@@ -2959,8 +2959,8 @@
         </p:nvSpPr>
         <p:spPr>
           <a:xfrm>
-            <a:off x="1792288" y="459581"/>
-            <a:ext cx="5486400" cy="3086100"/>
+            <a:off x="457200" y="1234440"/>
+            <a:ext cx="8229600" cy="822960"/>
           </a:xfrm>
         </p:spPr>
         <p:txBody>
@@ -2968,39 +2968,39 @@
           <a:lstStyle>
             <a:lvl1pPr marL="0" indent="0">
               <a:buNone/>
-              <a:defRPr sz="2400"/>
+              <a:defRPr/>
             </a:lvl1pPr>
             <a:lvl2pPr marL="342900" indent="0">
               <a:buNone/>
-              <a:defRPr sz="2100"/>
+              <a:defRPr/>
             </a:lvl2pPr>
             <a:lvl3pPr marL="685800" indent="0">
               <a:buNone/>
-              <a:defRPr sz="1800"/>
+              <a:defRPr/>
             </a:lvl3pPr>
             <a:lvl4pPr marL="1028700" indent="0">
               <a:buNone/>
-              <a:defRPr sz="1500"/>
+              <a:defRPr/>
             </a:lvl4pPr>
             <a:lvl5pPr marL="1371600" indent="0">
               <a:buNone/>
-              <a:defRPr sz="1500"/>
+              <a:defRPr/>
             </a:lvl5pPr>
             <a:lvl6pPr marL="1714500" indent="0">
               <a:buNone/>
-              <a:defRPr sz="1500"/>
+              <a:defRPr/>
             </a:lvl6pPr>
             <a:lvl7pPr marL="2057400" indent="0">
               <a:buNone/>
-              <a:defRPr sz="1500"/>
+              <a:defRPr/>
             </a:lvl7pPr>
             <a:lvl8pPr marL="2400300" indent="0">
               <a:buNone/>
-              <a:defRPr sz="1500"/>
+              <a:defRPr/>
             </a:lvl8pPr>
             <a:lvl9pPr marL="2743200" indent="0">
               <a:buNone/>
-              <a:defRPr sz="1500"/>
+              <a:defRPr/>
             </a:lvl9pPr>
           </a:lstStyle>
           <a:p>
@@ -3020,8 +3020,8 @@
         </p:nvSpPr>
         <p:spPr>
           <a:xfrm>
-            <a:off x="1792288" y="4025503"/>
-            <a:ext cx="5486400" cy="603647"/>
+            <a:off x="457200" y="1234440"/>
+            <a:ext cx="8229600" cy="822960"/>
           </a:xfrm>
         </p:spPr>
         <p:txBody>
@@ -3029,39 +3029,39 @@
           <a:lstStyle>
             <a:lvl1pPr marL="0" indent="0">
               <a:buNone/>
-              <a:defRPr sz="1050"/>
+              <a:defRPr/>
             </a:lvl1pPr>
             <a:lvl2pPr marL="342900" indent="0">
               <a:buNone/>
-              <a:defRPr sz="900"/>
+              <a:defRPr/>
             </a:lvl2pPr>
             <a:lvl3pPr marL="685800" indent="0">
               <a:buNone/>
-              <a:defRPr sz="750"/>
+              <a:defRPr/>
             </a:lvl3pPr>
             <a:lvl4pPr marL="1028700" indent="0">
               <a:buNone/>
-              <a:defRPr sz="675"/>
+              <a:defRPr/>
             </a:lvl4pPr>
             <a:lvl5pPr marL="1371600" indent="0">
               <a:buNone/>
-              <a:defRPr sz="675"/>
+              <a:defRPr/>
             </a:lvl5pPr>
             <a:lvl6pPr marL="1714500" indent="0">
               <a:buNone/>
-              <a:defRPr sz="675"/>
+              <a:defRPr/>
             </a:lvl6pPr>
             <a:lvl7pPr marL="2057400" indent="0">
               <a:buNone/>
-              <a:defRPr sz="675"/>
+              <a:defRPr/>
             </a:lvl7pPr>
             <a:lvl8pPr marL="2400300" indent="0">
               <a:buNone/>
-              <a:defRPr sz="675"/>
+              <a:defRPr/>
             </a:lvl8pPr>
             <a:lvl9pPr marL="2743200" indent="0">
               <a:buNone/>
-              <a:defRPr sz="675"/>
+              <a:defRPr/>
             </a:lvl9pPr>
           </a:lstStyle>
           <a:p>

--- a/Course/template.pptx
+++ b/Course/template.pptx
@@ -686,7 +686,7 @@
 </file>
 
 <file path=ppt/slideLayouts/slideLayout1.xml><?xml version="1.0" encoding="utf-8"?>
-<p:sldLayout xmlns:a="http://schemas.openxmlformats.org/drawingml/2006/main" xmlns:r="http://schemas.openxmlformats.org/officeDocument/2006/relationships" xmlns:p="http://schemas.openxmlformats.org/presentationml/2006/main" type="title" preserve="1">
+<p:sldLayout xmlns:a="http://schemas.openxmlformats.org/drawingml/2006/main" xmlns:r="http://schemas.openxmlformats.org/officeDocument/2006/relationships" xmlns:p="http://schemas.openxmlformats.org/presentationml/2006/main" type="title" preserve="1" showMasterSp="0">
   <p:cSld name="Title Slide">
     <p:spTree>
       <p:nvGrpSpPr>
@@ -3387,7 +3387,7 @@
       </p:sp>
       <p:pic>
         <p:nvPicPr>
-          <p:cNvPr id="2147483660" name="Logo 2147483660" descr="univaq_logo.png"/>
+          <p:cNvPr id="7" name="Logo 7" descr="univaq_logo.png"/>
           <p:cNvPicPr>
             <a:picLocks noChangeAspect="1"/>
           </p:cNvPicPr>
@@ -3684,7 +3684,7 @@
 </file>
 
 <file path=ppt/slides/slide1.xml><?xml version="1.0" encoding="utf-8"?>
-<p:sld xmlns:a="http://schemas.openxmlformats.org/drawingml/2006/main" xmlns:r="http://schemas.openxmlformats.org/officeDocument/2006/relationships" xmlns:p="http://schemas.openxmlformats.org/presentationml/2006/main">
+<p:sld xmlns:a="http://schemas.openxmlformats.org/drawingml/2006/main" xmlns:r="http://schemas.openxmlformats.org/officeDocument/2006/relationships" xmlns:p="http://schemas.openxmlformats.org/presentationml/2006/main" xmlns:p14="http://schemas.microsoft.com/office/powerpoint/2010/main">
   <p:cSld>
     <p:spTree>
       <p:nvGrpSpPr>
@@ -3710,7 +3710,12 @@
             <p:ph type="ctrTitle"/>
           </p:nvPr>
         </p:nvSpPr>
-        <p:spPr/>
+        <p:spPr>
+          <a:xfrm>
+            <a:off x="685800" y="1597819"/>
+            <a:ext cx="7772400" cy="1102519"/>
+          </a:xfrm>
+        </p:spPr>
         <p:txBody>
           <a:bodyPr/>
           <a:lstStyle/>
@@ -3732,7 +3737,12 @@
             <p:ph type="subTitle" idx="1"/>
           </p:nvPr>
         </p:nvSpPr>
-        <p:spPr/>
+        <p:spPr>
+          <a:xfrm>
+            <a:off x="1371600" y="2914650"/>
+            <a:ext cx="6400800" cy="1314450"/>
+          </a:xfrm>
+        </p:spPr>
         <p:txBody>
           <a:bodyPr/>
           <a:lstStyle/>
@@ -3758,7 +3768,7 @@
 </file>
 
 <file path=ppt/slides/slide2.xml><?xml version="1.0" encoding="utf-8"?>
-<p:sld xmlns:a="http://schemas.openxmlformats.org/drawingml/2006/main" xmlns:r="http://schemas.openxmlformats.org/officeDocument/2006/relationships" xmlns:p="http://schemas.openxmlformats.org/presentationml/2006/main">
+<p:sld xmlns:a="http://schemas.openxmlformats.org/drawingml/2006/main" xmlns:r="http://schemas.openxmlformats.org/officeDocument/2006/relationships" xmlns:p="http://schemas.openxmlformats.org/presentationml/2006/main" xmlns:p14="http://schemas.microsoft.com/office/powerpoint/2010/main">
   <p:cSld>
     <p:spTree>
       <p:nvGrpSpPr>
@@ -3784,7 +3794,12 @@
             <p:ph type="title"/>
           </p:nvPr>
         </p:nvSpPr>
-        <p:spPr/>
+        <p:spPr>
+          <a:xfrm>
+            <a:off x="457200" y="205979"/>
+            <a:ext cx="8229600" cy="857250"/>
+          </a:xfrm>
+        </p:spPr>
         <p:txBody>
           <a:bodyPr/>
           <a:lstStyle/>
@@ -3806,7 +3821,12 @@
             <p:ph idx="1"/>
           </p:nvPr>
         </p:nvSpPr>
-        <p:spPr/>
+        <p:spPr>
+          <a:xfrm>
+            <a:off x="457200" y="1200151"/>
+            <a:ext cx="8229600" cy="3394472"/>
+          </a:xfrm>
+        </p:spPr>
         <p:txBody>
           <a:bodyPr/>
           <a:lstStyle/>
@@ -3839,7 +3859,7 @@
 </file>
 
 <file path=ppt/slides/slide3.xml><?xml version="1.0" encoding="utf-8"?>
-<p:sld xmlns:a="http://schemas.openxmlformats.org/drawingml/2006/main" xmlns:r="http://schemas.openxmlformats.org/officeDocument/2006/relationships" xmlns:p="http://schemas.openxmlformats.org/presentationml/2006/main">
+<p:sld xmlns:a="http://schemas.openxmlformats.org/drawingml/2006/main" xmlns:r="http://schemas.openxmlformats.org/officeDocument/2006/relationships" xmlns:p="http://schemas.openxmlformats.org/presentationml/2006/main" xmlns:p14="http://schemas.microsoft.com/office/powerpoint/2010/main">
   <p:cSld>
     <p:spTree>
       <p:nvGrpSpPr>
@@ -3865,7 +3885,12 @@
             <p:ph type="title"/>
           </p:nvPr>
         </p:nvSpPr>
-        <p:spPr/>
+        <p:spPr>
+          <a:xfrm>
+            <a:off x="722313" y="3305176"/>
+            <a:ext cx="7772400" cy="1021556"/>
+          </a:xfrm>
+        </p:spPr>
         <p:txBody>
           <a:bodyPr/>
           <a:lstStyle/>
@@ -3887,7 +3912,12 @@
             <p:ph type="body" idx="1"/>
           </p:nvPr>
         </p:nvSpPr>
-        <p:spPr/>
+        <p:spPr>
+          <a:xfrm>
+            <a:off x="722313" y="2180035"/>
+            <a:ext cx="7772400" cy="1125140"/>
+          </a:xfrm>
+        </p:spPr>
       </p:sp>
     </p:spTree>
     <p:extLst>
@@ -3903,7 +3933,7 @@
 </file>
 
 <file path=ppt/slides/slide4.xml><?xml version="1.0" encoding="utf-8"?>
-<p:sld xmlns:a="http://schemas.openxmlformats.org/drawingml/2006/main" xmlns:r="http://schemas.openxmlformats.org/officeDocument/2006/relationships" xmlns:p="http://schemas.openxmlformats.org/presentationml/2006/main">
+<p:sld xmlns:a="http://schemas.openxmlformats.org/drawingml/2006/main" xmlns:r="http://schemas.openxmlformats.org/officeDocument/2006/relationships" xmlns:p="http://schemas.openxmlformats.org/presentationml/2006/main" xmlns:p14="http://schemas.microsoft.com/office/powerpoint/2010/main">
   <p:cSld>
     <p:spTree>
       <p:nvGrpSpPr>
@@ -3929,7 +3959,12 @@
             <p:ph type="title"/>
           </p:nvPr>
         </p:nvSpPr>
-        <p:spPr/>
+        <p:spPr>
+          <a:xfrm>
+            <a:off x="457200" y="205979"/>
+            <a:ext cx="8229600" cy="857250"/>
+          </a:xfrm>
+        </p:spPr>
         <p:txBody>
           <a:bodyPr/>
           <a:lstStyle/>
@@ -3951,7 +3986,12 @@
             <p:ph sz="half" idx="1"/>
           </p:nvPr>
         </p:nvSpPr>
-        <p:spPr/>
+        <p:spPr>
+          <a:xfrm>
+            <a:off x="457200" y="1200151"/>
+            <a:ext cx="4038600" cy="3394472"/>
+          </a:xfrm>
+        </p:spPr>
         <p:txBody>
           <a:bodyPr/>
           <a:lstStyle/>
@@ -3984,7 +4024,12 @@
             <p:ph sz="half" idx="2"/>
           </p:nvPr>
         </p:nvSpPr>
-        <p:spPr/>
+        <p:spPr>
+          <a:xfrm>
+            <a:off x="4648200" y="1200151"/>
+            <a:ext cx="4038600" cy="3394472"/>
+          </a:xfrm>
+        </p:spPr>
         <p:txBody>
           <a:bodyPr/>
           <a:lstStyle/>
